--- a/automation/reel-template-pack/halloween/h3-caught-in-our-web/carousel/Template h3 - Caught in our web - Carousel.pptx
+++ b/automation/reel-template-pack/halloween/h3-caught-in-our-web/carousel/Template h3 - Caught in our web - Carousel.pptx
@@ -3887,33 +3887,34 @@
           </a:prstGeom>
         </p:spPr>
       </p:pic>
-      <p:pic>
-        <p:nvPicPr>
-          <p:cNvPr id="3" name="PHOTO: Your product, held up (fills the page)" descr="001.png"/>
-          <p:cNvPicPr>
-            <a:picLocks noChangeAspect="1"/>
-          </p:cNvPicPr>
+      <p:sp>
+        <p:nvSpPr>
+          <p:cNvPr id="3" name="PHOTO: Your product, held up (fills the page)"/>
+          <p:cNvSpPr/>
           <p:nvPr/>
-        </p:nvPicPr>
-        <p:blipFill>
-          <a:blip r:embed="rId3"/>
-          <a:stretch>
-            <a:fillRect/>
-          </a:stretch>
-        </p:blipFill>
-        <p:spPr>
-          <a:xfrm>
+        </p:nvSpPr>
+        <p:spPr>
+          <a:xfrm rot="0">
             <a:off x="0" y="0"/>
             <a:ext cx="10287000" cy="13716000"/>
           </a:xfrm>
           <a:prstGeom prst="rect">
             <a:avLst/>
           </a:prstGeom>
-        </p:spPr>
-      </p:pic>
+          <a:blipFill rotWithShape="1">
+            <a:blip r:embed="rId3"/>
+            <a:stretch>
+              <a:fillRect/>
+            </a:stretch>
+          </a:blipFill>
+          <a:ln>
+            <a:noFill/>
+          </a:ln>
+        </p:spPr>
+      </p:sp>
       <p:pic>
         <p:nvPicPr>
-          <p:cNvPr id="4" name="CAUGHT" descr="002.png"/>
+          <p:cNvPr id="4" name="CAUGHT" descr="001.png"/>
           <p:cNvPicPr>
             <a:picLocks noChangeAspect="1"/>
           </p:cNvPicPr>
@@ -3937,7 +3938,7 @@
       </p:pic>
       <p:pic>
         <p:nvPicPr>
-          <p:cNvPr id="5" name="silk" descr="003.png"/>
+          <p:cNvPr id="5" name="silk" descr="002.png"/>
           <p:cNvPicPr>
             <a:picLocks noChangeAspect="1"/>
           </p:cNvPicPr>
@@ -3961,7 +3962,7 @@
       </p:pic>
       <p:pic>
         <p:nvPicPr>
-          <p:cNvPr id="6" name="spider" descr="004.png"/>
+          <p:cNvPr id="6" name="spider" descr="003.png"/>
           <p:cNvPicPr>
             <a:picLocks noChangeAspect="1"/>
           </p:cNvPicPr>
@@ -4141,7 +4142,7 @@
       </p:pic>
       <p:pic>
         <p:nvPicPr>
-          <p:cNvPr id="3" name="web" descr="005.png"/>
+          <p:cNvPr id="3" name="web" descr="004.png"/>
           <p:cNvPicPr>
             <a:picLocks noChangeAspect="1"/>
           </p:cNvPicPr>
@@ -4165,7 +4166,7 @@
       </p:pic>
       <p:pic>
         <p:nvPicPr>
-          <p:cNvPr id="4" name="spider" descr="006.png"/>
+          <p:cNvPr id="4" name="spider" descr="005.png"/>
           <p:cNvPicPr>
             <a:picLocks noChangeAspect="1"/>
           </p:cNvPicPr>
@@ -4317,30 +4318,152 @@
           </a:p>
         </p:txBody>
       </p:sp>
-      <p:pic>
-        <p:nvPicPr>
-          <p:cNvPr id="7" name="arrow" descr="007.png"/>
-          <p:cNvPicPr>
-            <a:picLocks noChangeAspect="1"/>
-          </p:cNvPicPr>
+      <p:sp>
+        <p:nvSpPr>
+          <p:cNvPr id="7" name="arrow"/>
+          <p:cNvSpPr/>
           <p:nvPr/>
-        </p:nvPicPr>
-        <p:blipFill>
-          <a:blip r:embed="rId5"/>
-          <a:stretch>
-            <a:fillRect/>
-          </a:stretch>
-        </p:blipFill>
-        <p:spPr>
-          <a:xfrm rot="120000">
+        </p:nvSpPr>
+        <p:spPr>
+          <a:xfrm rot="-120000">
             <a:off x="4905375" y="12272962"/>
             <a:ext cx="1619250" cy="504825"/>
           </a:xfrm>
-          <a:prstGeom prst="rect">
+          <a:custGeom>
             <a:avLst/>
-          </a:prstGeom>
-        </p:spPr>
-      </p:pic>
+            <a:gdLst/>
+            <a:ahLst/>
+            <a:cxnLst/>
+            <a:rect l="0" t="0" r="r" b="b"/>
+            <a:pathLst>
+              <a:path w="1619250" h="504825">
+                <a:moveTo>
+                  <a:pt x="1257300" y="480450"/>
+                </a:moveTo>
+                <a:cubicBezTo>
+                  <a:pt x="1257300" y="466626"/>
+                  <a:pt x="1253177" y="458623"/>
+                  <a:pt x="1247775" y="461962"/>
+                </a:cubicBezTo>
+                <a:cubicBezTo>
+                  <a:pt x="1242536" y="465200"/>
+                  <a:pt x="1238235" y="460095"/>
+                  <a:pt x="1238218" y="450618"/>
+                </a:cubicBezTo>
+                <a:cubicBezTo>
+                  <a:pt x="1238201" y="441141"/>
+                  <a:pt x="1271222" y="402197"/>
+                  <a:pt x="1311598" y="364076"/>
+                </a:cubicBezTo>
+                <a:lnTo>
+                  <a:pt x="1385010" y="294765"/>
+                </a:lnTo>
+                <a:lnTo>
+                  <a:pt x="1266386" y="300090"/>
+                </a:lnTo>
+                <a:cubicBezTo>
+                  <a:pt x="1201143" y="303019"/>
+                  <a:pt x="950595" y="310034"/>
+                  <a:pt x="709612" y="315678"/>
+                </a:cubicBezTo>
+                <a:cubicBezTo>
+                  <a:pt x="468630" y="321323"/>
+                  <a:pt x="223235" y="328686"/>
+                  <a:pt x="164292" y="332039"/>
+                </a:cubicBezTo>
+                <a:cubicBezTo>
+                  <a:pt x="81649" y="336741"/>
+                  <a:pt x="57124" y="335412"/>
+                  <a:pt x="57135" y="326231"/>
+                </a:cubicBezTo>
+                <a:cubicBezTo>
+                  <a:pt x="57144" y="319190"/>
+                  <a:pt x="44728" y="314325"/>
+                  <a:pt x="26754" y="314324"/>
+                </a:cubicBezTo>
+                <a:cubicBezTo>
+                  <a:pt x="-1225" y="314324"/>
+                  <a:pt x="-2231" y="313294"/>
+                  <a:pt x="14096" y="301355"/>
+                </a:cubicBezTo>
+                <a:cubicBezTo>
+                  <a:pt x="39698" y="282634"/>
+                  <a:pt x="40970" y="257174"/>
+                  <a:pt x="16302" y="257175"/>
+                </a:cubicBezTo>
+                <a:cubicBezTo>
+                  <a:pt x="4858" y="257175"/>
+                  <a:pt x="89" y="253819"/>
+                  <a:pt x="5238" y="249388"/>
+                </a:cubicBezTo>
+                <a:cubicBezTo>
+                  <a:pt x="38131" y="221084"/>
+                  <a:pt x="254251" y="205225"/>
+                  <a:pt x="757237" y="194206"/>
+                </a:cubicBezTo>
+                <a:cubicBezTo>
+                  <a:pt x="909161" y="190878"/>
+                  <a:pt x="1109402" y="185468"/>
+                  <a:pt x="1202217" y="182184"/>
+                </a:cubicBezTo>
+                <a:lnTo>
+                  <a:pt x="1370973" y="176212"/>
+                </a:lnTo>
+                <a:lnTo>
+                  <a:pt x="1306992" y="128587"/>
+                </a:lnTo>
+                <a:cubicBezTo>
+                  <a:pt x="1271803" y="102393"/>
+                  <a:pt x="1242899" y="74533"/>
+                  <a:pt x="1242760" y="66675"/>
+                </a:cubicBezTo>
+                <a:cubicBezTo>
+                  <a:pt x="1242622" y="58816"/>
+                  <a:pt x="1239154" y="47029"/>
+                  <a:pt x="1235054" y="40481"/>
+                </a:cubicBezTo>
+                <a:cubicBezTo>
+                  <a:pt x="1224885" y="24237"/>
+                  <a:pt x="1235722" y="9152"/>
+                  <a:pt x="1252842" y="15722"/>
+                </a:cubicBezTo>
+                <a:cubicBezTo>
+                  <a:pt x="1260532" y="18673"/>
+                  <a:pt x="1266825" y="16343"/>
+                  <a:pt x="1266825" y="10544"/>
+                </a:cubicBezTo>
+                <a:cubicBezTo>
+                  <a:pt x="1266825" y="-9201"/>
+                  <a:pt x="1283898" y="-5"/>
+                  <a:pt x="1441695" y="104733"/>
+                </a:cubicBezTo>
+                <a:cubicBezTo>
+                  <a:pt x="1620939" y="223706"/>
+                  <a:pt x="1633427" y="237454"/>
+                  <a:pt x="1593675" y="272033"/>
+                </a:cubicBezTo>
+                <a:cubicBezTo>
+                  <a:pt x="1563065" y="298659"/>
+                  <a:pt x="1336730" y="468567"/>
+                  <a:pt x="1320437" y="477150"/>
+                </a:cubicBezTo>
+                <a:cubicBezTo>
+                  <a:pt x="1255250" y="511492"/>
+                  <a:pt x="1257300" y="511385"/>
+                  <a:pt x="1257300" y="480450"/>
+                </a:cubicBezTo>
+                <a:close/>
+              </a:path>
+            </a:pathLst>
+          </a:custGeom>
+          <a:solidFill>
+            <a:srgbClr val="161418"/>
+          </a:solidFill>
+          <a:ln>
+            <a:noFill/>
+          </a:ln>
+        </p:spPr>
+      </p:sp>
     </p:spTree>
   </p:cSld>
   <p:clrMapOvr>
@@ -4385,7 +4508,7 @@
       </p:pic>
       <p:pic>
         <p:nvPicPr>
-          <p:cNvPr id="3" name="silk" descr="008.png"/>
+          <p:cNvPr id="3" name="silk" descr="006.png"/>
           <p:cNvPicPr>
             <a:picLocks noChangeAspect="1"/>
           </p:cNvPicPr>
@@ -4409,7 +4532,7 @@
       </p:pic>
       <p:pic>
         <p:nvPicPr>
-          <p:cNvPr id="4" name="round paper" descr="009.png"/>
+          <p:cNvPr id="4" name="round paper" descr="007.png"/>
           <p:cNvPicPr>
             <a:picLocks noChangeAspect="1"/>
           </p:cNvPicPr>
@@ -4431,33 +4554,34 @@
           </a:prstGeom>
         </p:spPr>
       </p:pic>
-      <p:pic>
-        <p:nvPicPr>
-          <p:cNvPr id="5" name="PHOTO: Reason 1" descr="010.png"/>
-          <p:cNvPicPr>
-            <a:picLocks noChangeAspect="1"/>
-          </p:cNvPicPr>
+      <p:sp>
+        <p:nvSpPr>
+          <p:cNvPr id="5" name="PHOTO: Reason 1"/>
+          <p:cNvSpPr/>
           <p:nvPr/>
-        </p:nvPicPr>
-        <p:blipFill>
-          <a:blip r:embed="rId5"/>
-          <a:stretch>
-            <a:fillRect/>
-          </a:stretch>
-        </p:blipFill>
-        <p:spPr>
-          <a:xfrm>
+        </p:nvSpPr>
+        <p:spPr>
+          <a:xfrm rot="0">
             <a:off x="3143250" y="3143250"/>
             <a:ext cx="5905500" cy="5905500"/>
           </a:xfrm>
           <a:prstGeom prst="ellipse">
             <a:avLst/>
           </a:prstGeom>
-        </p:spPr>
-      </p:pic>
+          <a:blipFill rotWithShape="1">
+            <a:blip r:embed="rId5"/>
+            <a:stretch>
+              <a:fillRect/>
+            </a:stretch>
+          </a:blipFill>
+          <a:ln>
+            <a:noFill/>
+          </a:ln>
+        </p:spPr>
+      </p:sp>
       <p:pic>
         <p:nvPicPr>
-          <p:cNvPr id="6" name="spider" descr="011.png"/>
+          <p:cNvPr id="6" name="spider" descr="008.png"/>
           <p:cNvPicPr>
             <a:picLocks noChangeAspect="1"/>
           </p:cNvPicPr>
@@ -4580,7 +4704,7 @@
       </p:pic>
       <p:pic>
         <p:nvPicPr>
-          <p:cNvPr id="3" name="silk" descr="012.png"/>
+          <p:cNvPr id="3" name="silk" descr="009.png"/>
           <p:cNvPicPr>
             <a:picLocks noChangeAspect="1"/>
           </p:cNvPicPr>
@@ -4604,7 +4728,7 @@
       </p:pic>
       <p:pic>
         <p:nvPicPr>
-          <p:cNvPr id="4" name="round paper" descr="013.png"/>
+          <p:cNvPr id="4" name="round paper" descr="010.png"/>
           <p:cNvPicPr>
             <a:picLocks noChangeAspect="1"/>
           </p:cNvPicPr>
@@ -4626,33 +4750,34 @@
           </a:prstGeom>
         </p:spPr>
       </p:pic>
-      <p:pic>
-        <p:nvPicPr>
-          <p:cNvPr id="5" name="PHOTO: Reason 2" descr="014.png"/>
-          <p:cNvPicPr>
-            <a:picLocks noChangeAspect="1"/>
-          </p:cNvPicPr>
+      <p:sp>
+        <p:nvSpPr>
+          <p:cNvPr id="5" name="PHOTO: Reason 2"/>
+          <p:cNvSpPr/>
           <p:nvPr/>
-        </p:nvPicPr>
-        <p:blipFill>
-          <a:blip r:embed="rId5"/>
-          <a:stretch>
-            <a:fillRect/>
-          </a:stretch>
-        </p:blipFill>
-        <p:spPr>
-          <a:xfrm>
+        </p:nvSpPr>
+        <p:spPr>
+          <a:xfrm rot="0">
             <a:off x="1047750" y="2381250"/>
             <a:ext cx="4191000" cy="4191000"/>
           </a:xfrm>
           <a:prstGeom prst="ellipse">
             <a:avLst/>
           </a:prstGeom>
-        </p:spPr>
-      </p:pic>
+          <a:blipFill rotWithShape="1">
+            <a:blip r:embed="rId5"/>
+            <a:stretch>
+              <a:fillRect/>
+            </a:stretch>
+          </a:blipFill>
+          <a:ln>
+            <a:noFill/>
+          </a:ln>
+        </p:spPr>
+      </p:sp>
       <p:pic>
         <p:nvPicPr>
-          <p:cNvPr id="6" name="round paper" descr="013.png"/>
+          <p:cNvPr id="6" name="round paper" descr="010.png"/>
           <p:cNvPicPr>
             <a:picLocks noChangeAspect="1"/>
           </p:cNvPicPr>
@@ -4674,30 +4799,31 @@
           </a:prstGeom>
         </p:spPr>
       </p:pic>
-      <p:pic>
-        <p:nvPicPr>
-          <p:cNvPr id="7" name="PHOTO: Reason 3" descr="014.png"/>
-          <p:cNvPicPr>
-            <a:picLocks noChangeAspect="1"/>
-          </p:cNvPicPr>
+      <p:sp>
+        <p:nvSpPr>
+          <p:cNvPr id="7" name="PHOTO: Reason 3"/>
+          <p:cNvSpPr/>
           <p:nvPr/>
-        </p:nvPicPr>
-        <p:blipFill>
-          <a:blip r:embed="rId5"/>
-          <a:stretch>
-            <a:fillRect/>
-          </a:stretch>
-        </p:blipFill>
-        <p:spPr>
-          <a:xfrm>
+        </p:nvSpPr>
+        <p:spPr>
+          <a:xfrm rot="0">
             <a:off x="5048250" y="7239000"/>
             <a:ext cx="4191000" cy="4191000"/>
           </a:xfrm>
           <a:prstGeom prst="ellipse">
             <a:avLst/>
           </a:prstGeom>
-        </p:spPr>
-      </p:pic>
+          <a:blipFill rotWithShape="1">
+            <a:blip r:embed="rId5"/>
+            <a:stretch>
+              <a:fillRect/>
+            </a:stretch>
+          </a:blipFill>
+          <a:ln>
+            <a:noFill/>
+          </a:ln>
+        </p:spPr>
+      </p:sp>
       <p:sp>
         <p:nvSpPr>
           <p:cNvPr id="8" name="TEXT: [THE SCENT]"/>
@@ -4856,7 +4982,7 @@
       </p:pic>
       <p:pic>
         <p:nvPicPr>
-          <p:cNvPr id="3" name="photo border" descr="017.png"/>
+          <p:cNvPr id="3" name="photo border" descr="012.png"/>
           <p:cNvPicPr>
             <a:picLocks noChangeAspect="1"/>
           </p:cNvPicPr>
@@ -4878,33 +5004,34 @@
           </a:prstGeom>
         </p:spPr>
       </p:pic>
-      <p:pic>
-        <p:nvPicPr>
-          <p:cNvPr id="4" name="PHOTO: Reason 4" descr="018.png"/>
-          <p:cNvPicPr>
-            <a:picLocks noChangeAspect="1"/>
-          </p:cNvPicPr>
+      <p:sp>
+        <p:nvSpPr>
+          <p:cNvPr id="4" name="PHOTO: Reason 4"/>
+          <p:cNvSpPr/>
           <p:nvPr/>
-        </p:nvPicPr>
-        <p:blipFill>
-          <a:blip r:embed="rId4"/>
-          <a:stretch>
-            <a:fillRect/>
-          </a:stretch>
-        </p:blipFill>
-        <p:spPr>
-          <a:xfrm rot="21480000">
+        </p:nvSpPr>
+        <p:spPr>
+          <a:xfrm rot="120000">
             <a:off x="1524000" y="3333750"/>
             <a:ext cx="7239000" cy="8572500"/>
           </a:xfrm>
           <a:prstGeom prst="rect">
             <a:avLst/>
           </a:prstGeom>
-        </p:spPr>
-      </p:pic>
+          <a:blipFill rotWithShape="1">
+            <a:blip r:embed="rId4"/>
+            <a:stretch>
+              <a:fillRect/>
+            </a:stretch>
+          </a:blipFill>
+          <a:ln>
+            <a:noFill/>
+          </a:ln>
+        </p:spPr>
+      </p:sp>
       <p:pic>
         <p:nvPicPr>
-          <p:cNvPr id="5" name="silk" descr="019.png"/>
+          <p:cNvPr id="5" name="silk" descr="013.png"/>
           <p:cNvPicPr>
             <a:picLocks noChangeAspect="1"/>
           </p:cNvPicPr>
@@ -4928,7 +5055,7 @@
       </p:pic>
       <p:pic>
         <p:nvPicPr>
-          <p:cNvPr id="6" name="spider" descr="020.png"/>
+          <p:cNvPr id="6" name="spider" descr="014.png"/>
           <p:cNvPicPr>
             <a:picLocks noChangeAspect="1"/>
           </p:cNvPicPr>
@@ -5051,7 +5178,7 @@
       </p:pic>
       <p:pic>
         <p:nvPicPr>
-          <p:cNvPr id="3" name="web" descr="005.png"/>
+          <p:cNvPr id="3" name="web" descr="004.png"/>
           <p:cNvPicPr>
             <a:picLocks noChangeAspect="1"/>
           </p:cNvPicPr>
@@ -5075,7 +5202,7 @@
       </p:pic>
       <p:pic>
         <p:nvPicPr>
-          <p:cNvPr id="4" name="round paper" descr="022.png"/>
+          <p:cNvPr id="4" name="round paper" descr="016.png"/>
           <p:cNvPicPr>
             <a:picLocks noChangeAspect="1"/>
           </p:cNvPicPr>
@@ -5097,33 +5224,34 @@
           </a:prstGeom>
         </p:spPr>
       </p:pic>
-      <p:pic>
-        <p:nvPicPr>
-          <p:cNvPr id="5" name="PHOTO: Your product" descr="023.png"/>
-          <p:cNvPicPr>
-            <a:picLocks noChangeAspect="1"/>
-          </p:cNvPicPr>
+      <p:sp>
+        <p:nvSpPr>
+          <p:cNvPr id="5" name="PHOTO: Your product"/>
+          <p:cNvSpPr/>
           <p:nvPr/>
-        </p:nvPicPr>
-        <p:blipFill>
-          <a:blip r:embed="rId5"/>
-          <a:stretch>
-            <a:fillRect/>
-          </a:stretch>
-        </p:blipFill>
-        <p:spPr>
-          <a:xfrm>
+        </p:nvSpPr>
+        <p:spPr>
+          <a:xfrm rot="0">
             <a:off x="3143250" y="5619750"/>
             <a:ext cx="4000500" cy="4000500"/>
           </a:xfrm>
           <a:prstGeom prst="ellipse">
             <a:avLst/>
           </a:prstGeom>
-        </p:spPr>
-      </p:pic>
+          <a:blipFill rotWithShape="1">
+            <a:blip r:embed="rId5"/>
+            <a:stretch>
+              <a:fillRect/>
+            </a:stretch>
+          </a:blipFill>
+          <a:ln>
+            <a:noFill/>
+          </a:ln>
+        </p:spPr>
+      </p:sp>
       <p:pic>
         <p:nvPicPr>
-          <p:cNvPr id="6" name="spider" descr="011.png"/>
+          <p:cNvPr id="6" name="spider" descr="008.png"/>
           <p:cNvPicPr>
             <a:picLocks noChangeAspect="1"/>
           </p:cNvPicPr>
@@ -5147,7 +5275,7 @@
       </p:pic>
       <p:pic>
         <p:nvPicPr>
-          <p:cNvPr id="7" name="COMMENT" descr="025.png"/>
+          <p:cNvPr id="7" name="COMMENT" descr="018.png"/>
           <p:cNvPicPr>
             <a:picLocks noChangeAspect="1"/>
           </p:cNvPicPr>

--- a/automation/reel-template-pack/halloween/h3-caught-in-our-web/carousel/Template h3 - Caught in our web - Carousel.pptx
+++ b/automation/reel-template-pack/halloween/h3-caught-in-our-web/carousel/Template h3 - Caught in our web - Carousel.pptx
@@ -4325,7 +4325,7 @@
           <p:nvPr/>
         </p:nvSpPr>
         <p:spPr>
-          <a:xfrm rot="-120000">
+          <a:xfrm rot="120000">
             <a:off x="4905375" y="12272962"/>
             <a:ext cx="1619250" cy="504825"/>
           </a:xfrm>
@@ -5011,7 +5011,7 @@
           <p:nvPr/>
         </p:nvSpPr>
         <p:spPr>
-          <a:xfrm rot="120000">
+          <a:xfrm rot="-120000">
             <a:off x="1524000" y="3333750"/>
             <a:ext cx="7239000" cy="8572500"/>
           </a:xfrm>
